--- a/Introduccion a la Ingenieria/Clases/Clase 2 - Historia y evolucion de la Ingenieria/Presentacion.pptx
+++ b/Introduccion a la Ingenieria/Clases/Clase 2 - Historia y evolucion de la Ingenieria/Presentacion.pptx
@@ -5653,7 +5653,7 @@
               </a:spcAft>
             </a:pPr>
             <a:r>
-              <a:rPr sz="1600" b="0" i="0">
+              <a:rPr sz="2000" b="0" i="0">
                 <a:solidFill>
                   <a:srgbClr val="333333"/>
                 </a:solidFill>
@@ -5662,7 +5662,7 @@
               <a:t>–   </a:t>
             </a:r>
             <a:r>
-              <a:rPr sz="1600" b="1" i="0">
+              <a:rPr sz="2000" b="1" i="0">
                 <a:solidFill>
                   <a:srgbClr val="333333"/>
                 </a:solidFill>
@@ -5671,7 +5671,7 @@
               <a:t>Trabajo dirigido:</a:t>
             </a:r>
             <a:r>
-              <a:rPr sz="1600" b="0" i="0">
+              <a:rPr sz="2000" b="0" i="0">
                 <a:solidFill>
                   <a:srgbClr val="333333"/>
                 </a:solidFill>
@@ -5687,7 +5687,7 @@
               </a:spcAft>
             </a:pPr>
             <a:r>
-              <a:rPr sz="1600" b="0" i="0">
+              <a:rPr sz="2000" b="0" i="0">
                 <a:solidFill>
                   <a:srgbClr val="333333"/>
                 </a:solidFill>
@@ -5696,7 +5696,7 @@
               <a:t>–   </a:t>
             </a:r>
             <a:r>
-              <a:rPr sz="1600" b="1" i="0">
+              <a:rPr sz="2000" b="1" i="0">
                 <a:solidFill>
                   <a:srgbClr val="333333"/>
                 </a:solidFill>
@@ -5705,7 +5705,7 @@
               <a:t>Trabajo independiente:</a:t>
             </a:r>
             <a:r>
-              <a:rPr sz="1600" b="0" i="0">
+              <a:rPr sz="2000" b="0" i="0">
                 <a:solidFill>
                   <a:srgbClr val="333333"/>
                 </a:solidFill>
@@ -5721,7 +5721,7 @@
               </a:spcAft>
             </a:pPr>
             <a:r>
-              <a:rPr sz="1600" b="0" i="0">
+              <a:rPr sz="2000" b="0" i="0">
                 <a:solidFill>
                   <a:srgbClr val="333333"/>
                 </a:solidFill>
@@ -5730,7 +5730,7 @@
               <a:t>–   </a:t>
             </a:r>
             <a:r>
-              <a:rPr sz="1600" b="1" i="0">
+              <a:rPr sz="2000" b="1" i="0">
                 <a:solidFill>
                   <a:srgbClr val="333333"/>
                 </a:solidFill>
@@ -5739,7 +5739,7 @@
               <a:t>Sesión 3 · Fundamentos básicos de la Ingeniería de Sistemas</a:t>
             </a:r>
             <a:r>
-              <a:rPr sz="1600" b="0" i="0">
+              <a:rPr sz="2000" b="0" i="0">
                 <a:solidFill>
                   <a:srgbClr val="333333"/>
                 </a:solidFill>
@@ -5755,7 +5755,7 @@
               </a:spcAft>
             </a:pPr>
             <a:r>
-              <a:rPr sz="1600" b="0" i="0">
+              <a:rPr sz="2000" b="0" i="0">
                 <a:solidFill>
                   <a:srgbClr val="333333"/>
                 </a:solidFill>
@@ -5764,7 +5764,7 @@
               <a:t>–   </a:t>
             </a:r>
             <a:r>
-              <a:rPr sz="1600" b="1" i="0">
+              <a:rPr sz="2000" b="1" i="0">
                 <a:solidFill>
                   <a:srgbClr val="333333"/>
                 </a:solidFill>
@@ -5773,7 +5773,7 @@
               <a:t>Aviso:</a:t>
             </a:r>
             <a:r>
-              <a:rPr sz="1600" b="0" i="0">
+              <a:rPr sz="2000" b="0" i="0">
                 <a:solidFill>
                   <a:srgbClr val="333333"/>
                 </a:solidFill>
@@ -5789,7 +5789,7 @@
               </a:spcAft>
             </a:pPr>
             <a:r>
-              <a:rPr sz="1600" b="0" i="0">
+              <a:rPr sz="2000" b="0" i="0">
                 <a:solidFill>
                   <a:srgbClr val="333333"/>
                 </a:solidFill>
@@ -5798,7 +5798,7 @@
               <a:t>–   </a:t>
             </a:r>
             <a:r>
-              <a:rPr sz="1600" b="1" i="0">
+              <a:rPr sz="2000" b="1" i="0">
                 <a:solidFill>
                   <a:srgbClr val="333333"/>
                 </a:solidFill>
@@ -5807,7 +5807,7 @@
               <a:t>Antes de salir:</a:t>
             </a:r>
             <a:r>
-              <a:rPr sz="1600" b="0" i="0">
+              <a:rPr sz="2000" b="0" i="0">
                 <a:solidFill>
                   <a:srgbClr val="333333"/>
                 </a:solidFill>
@@ -6381,7 +6381,7 @@
         <p:spPr>
           <a:xfrm>
             <a:off x="502920" y="2798064"/>
-            <a:ext cx="2164019" cy="2560320"/>
+            <a:ext cx="2164019" cy="3099816"/>
           </a:xfrm>
           <a:prstGeom prst="rect">
             <a:avLst/>
@@ -6496,7 +6496,7 @@
         <p:spPr>
           <a:xfrm>
             <a:off x="2758379" y="2798064"/>
-            <a:ext cx="2164019" cy="2560320"/>
+            <a:ext cx="2164019" cy="3099816"/>
           </a:xfrm>
           <a:prstGeom prst="rect">
             <a:avLst/>
@@ -6611,7 +6611,7 @@
         <p:spPr>
           <a:xfrm>
             <a:off x="5013838" y="2798064"/>
-            <a:ext cx="2164019" cy="2560320"/>
+            <a:ext cx="2164019" cy="3099816"/>
           </a:xfrm>
           <a:prstGeom prst="rect">
             <a:avLst/>
@@ -6726,7 +6726,7 @@
         <p:spPr>
           <a:xfrm>
             <a:off x="7269297" y="2798064"/>
-            <a:ext cx="2164019" cy="2560320"/>
+            <a:ext cx="2164019" cy="3099816"/>
           </a:xfrm>
           <a:prstGeom prst="rect">
             <a:avLst/>
@@ -6841,7 +6841,7 @@
         <p:spPr>
           <a:xfrm>
             <a:off x="9524756" y="2798064"/>
-            <a:ext cx="2164019" cy="2560320"/>
+            <a:ext cx="2164019" cy="3099816"/>
           </a:xfrm>
           <a:prstGeom prst="rect">
             <a:avLst/>
@@ -6875,8 +6875,8 @@
         </p:nvSpPr>
         <p:spPr>
           <a:xfrm>
-            <a:off x="457200" y="5943600"/>
-            <a:ext cx="11277295" cy="365760"/>
+            <a:off x="457200" y="5806440"/>
+            <a:ext cx="11277295" cy="640080"/>
           </a:xfrm>
           <a:prstGeom prst="rect">
             <a:avLst/>
@@ -7129,7 +7129,7 @@
               </a:spcAft>
             </a:pPr>
             <a:r>
-              <a:rPr sz="1600" b="0" i="0">
+              <a:rPr sz="2000" b="0" i="0">
                 <a:solidFill>
                   <a:srgbClr val="333333"/>
                 </a:solidFill>
@@ -7138,7 +7138,7 @@
               <a:t>–   Ubicar </a:t>
             </a:r>
             <a:r>
-              <a:rPr sz="1600" b="1" i="0">
+              <a:rPr sz="2000" b="1" i="0">
                 <a:solidFill>
                   <a:srgbClr val="333333"/>
                 </a:solidFill>
@@ -7147,7 +7147,7 @@
               <a:t>seis hitos</a:t>
             </a:r>
             <a:r>
-              <a:rPr sz="1600" b="0" i="0">
+              <a:rPr sz="2000" b="0" i="0">
                 <a:solidFill>
                   <a:srgbClr val="333333"/>
                 </a:solidFill>
@@ -7163,7 +7163,7 @@
               </a:spcAft>
             </a:pPr>
             <a:r>
-              <a:rPr sz="1600" b="0" i="0">
+              <a:rPr sz="2000" b="0" i="0">
                 <a:solidFill>
                   <a:srgbClr val="333333"/>
                 </a:solidFill>
@@ -7172,7 +7172,7 @@
               <a:t>–   Explicar por qué la ingeniería de sistemas </a:t>
             </a:r>
             <a:r>
-              <a:rPr sz="1600" b="1" i="0">
+              <a:rPr sz="2000" b="1" i="0">
                 <a:solidFill>
                   <a:srgbClr val="333333"/>
                 </a:solidFill>
@@ -7181,7 +7181,7 @@
               <a:t>nace como respuesta a un fracaso</a:t>
             </a:r>
             <a:r>
-              <a:rPr sz="1600" b="0" i="0">
+              <a:rPr sz="2000" b="0" i="0">
                 <a:solidFill>
                   <a:srgbClr val="333333"/>
                 </a:solidFill>
@@ -7197,7 +7197,7 @@
               </a:spcAft>
             </a:pPr>
             <a:r>
-              <a:rPr sz="1600" b="0" i="0">
+              <a:rPr sz="2000" b="0" i="0">
                 <a:solidFill>
                   <a:srgbClr val="333333"/>
                 </a:solidFill>
@@ -7206,7 +7206,7 @@
               <a:t>–   Construir una </a:t>
             </a:r>
             <a:r>
-              <a:rPr sz="1600" b="1" i="0">
+              <a:rPr sz="2000" b="1" i="0">
                 <a:solidFill>
                   <a:srgbClr val="333333"/>
                 </a:solidFill>
@@ -7215,7 +7215,7 @@
               <a:t>línea de tiempo</a:t>
             </a:r>
             <a:r>
-              <a:rPr sz="1600" b="0" i="0">
+              <a:rPr sz="2000" b="0" i="0">
                 <a:solidFill>
                   <a:srgbClr val="333333"/>
                 </a:solidFill>
@@ -7231,7 +7231,7 @@
               </a:spcAft>
             </a:pPr>
             <a:r>
-              <a:rPr sz="1600" b="0" i="0">
+              <a:rPr sz="2000" b="0" i="0">
                 <a:solidFill>
                   <a:srgbClr val="333333"/>
                 </a:solidFill>
@@ -7240,7 +7240,7 @@
               <a:t>–   Identificar, para un hito, </a:t>
             </a:r>
             <a:r>
-              <a:rPr sz="1600" b="1" i="0">
+              <a:rPr sz="2000" b="1" i="0">
                 <a:solidFill>
                   <a:srgbClr val="333333"/>
                 </a:solidFill>
@@ -7249,7 +7249,7 @@
               <a:t>qué parte de ese problema sigue vivo hoy</a:t>
             </a:r>
             <a:r>
-              <a:rPr sz="1600" b="0" i="0">
+              <a:rPr sz="2000" b="0" i="0">
                 <a:solidFill>
                   <a:srgbClr val="333333"/>
                 </a:solidFill>
@@ -7884,7 +7884,7 @@
               </a:spcAft>
             </a:pPr>
             <a:r>
-              <a:rPr sz="1300" b="0" i="0">
+              <a:rPr sz="1500" b="0" i="0">
                 <a:solidFill>
                   <a:srgbClr val="333333"/>
                 </a:solidFill>
@@ -7900,7 +7900,7 @@
               </a:spcAft>
             </a:pPr>
             <a:r>
-              <a:rPr sz="1300" b="0" i="0">
+              <a:rPr sz="1500" b="0" i="0">
                 <a:solidFill>
                   <a:srgbClr val="333333"/>
                 </a:solidFill>
@@ -7916,7 +7916,7 @@
               </a:spcAft>
             </a:pPr>
             <a:r>
-              <a:rPr sz="1300" b="0" i="0">
+              <a:rPr sz="1500" b="0" i="0">
                 <a:solidFill>
                   <a:srgbClr val="333333"/>
                 </a:solidFill>
@@ -7932,7 +7932,7 @@
               </a:spcAft>
             </a:pPr>
             <a:r>
-              <a:rPr sz="1300" b="0" i="0">
+              <a:rPr sz="1500" b="0" i="0">
                 <a:solidFill>
                   <a:srgbClr val="333333"/>
                 </a:solidFill>
@@ -7948,7 +7948,7 @@
               </a:spcAft>
             </a:pPr>
             <a:r>
-              <a:rPr sz="1300" b="0" i="0">
+              <a:rPr sz="1500" b="0" i="0">
                 <a:solidFill>
                   <a:srgbClr val="333333"/>
                 </a:solidFill>
@@ -8108,7 +8108,7 @@
               </a:spcAft>
             </a:pPr>
             <a:r>
-              <a:rPr sz="1300" b="0" i="0">
+              <a:rPr sz="1500" b="0" i="0">
                 <a:solidFill>
                   <a:srgbClr val="333333"/>
                 </a:solidFill>
@@ -8117,7 +8117,7 @@
               <a:t>–   Empezó con </a:t>
             </a:r>
             <a:r>
-              <a:rPr sz="1300" b="1" i="0">
+              <a:rPr sz="1500" b="1" i="0">
                 <a:solidFill>
                   <a:srgbClr val="333333"/>
                 </a:solidFill>
@@ -8126,7 +8126,7 @@
               <a:t>proyectos que fracasaron</a:t>
             </a:r>
             <a:r>
-              <a:rPr sz="1300" b="0" i="0">
+              <a:rPr sz="1500" b="0" i="0">
                 <a:solidFill>
                   <a:srgbClr val="333333"/>
                 </a:solidFill>
@@ -8142,7 +8142,7 @@
               </a:spcAft>
             </a:pPr>
             <a:r>
-              <a:rPr sz="1300" b="0" i="0">
+              <a:rPr sz="1500" b="0" i="0">
                 <a:solidFill>
                   <a:srgbClr val="333333"/>
                 </a:solidFill>
@@ -8151,7 +8151,7 @@
               <a:t>–   Cada década llegó </a:t>
             </a:r>
             <a:r>
-              <a:rPr sz="1300" b="1" i="0">
+              <a:rPr sz="1500" b="1" i="0">
                 <a:solidFill>
                   <a:srgbClr val="333333"/>
                 </a:solidFill>
@@ -8160,7 +8160,7 @@
               <a:t>un problema nuevo de escala</a:t>
             </a:r>
             <a:r>
-              <a:rPr sz="1300" b="0" i="0">
+              <a:rPr sz="1500" b="0" i="0">
                 <a:solidFill>
                   <a:srgbClr val="333333"/>
                 </a:solidFill>
@@ -8176,7 +8176,7 @@
               </a:spcAft>
             </a:pPr>
             <a:r>
-              <a:rPr sz="1300" b="0" i="0">
+              <a:rPr sz="1500" b="0" i="0">
                 <a:solidFill>
                   <a:srgbClr val="333333"/>
                 </a:solidFill>
@@ -8185,7 +8185,7 @@
               <a:t>–   Era difícil porque </a:t>
             </a:r>
             <a:r>
-              <a:rPr sz="1300" b="1" i="0">
+              <a:rPr sz="1500" b="1" i="0">
                 <a:solidFill>
                   <a:srgbClr val="333333"/>
                 </a:solidFill>
@@ -8194,7 +8194,7 @@
               <a:t>nadie sabía cómo organizar el trabajo de 100 personas</a:t>
             </a:r>
             <a:r>
-              <a:rPr sz="1300" b="0" i="0">
+              <a:rPr sz="1500" b="0" i="0">
                 <a:solidFill>
                   <a:srgbClr val="333333"/>
                 </a:solidFill>
@@ -8210,7 +8210,7 @@
               </a:spcAft>
             </a:pPr>
             <a:r>
-              <a:rPr sz="1300" b="0" i="0">
+              <a:rPr sz="1500" b="0" i="0">
                 <a:solidFill>
                   <a:srgbClr val="333333"/>
                 </a:solidFill>
@@ -8219,7 +8219,7 @@
               <a:t>–   El primer método formal es de </a:t>
             </a:r>
             <a:r>
-              <a:rPr sz="1300" b="1" i="0">
+              <a:rPr sz="1500" b="1" i="0">
                 <a:solidFill>
                   <a:srgbClr val="333333"/>
                 </a:solidFill>
@@ -8228,7 +8228,7 @@
               <a:t>1970</a:t>
             </a:r>
             <a:r>
-              <a:rPr sz="1300" b="0" i="0">
+              <a:rPr sz="1500" b="0" i="0">
                 <a:solidFill>
                   <a:srgbClr val="333333"/>
                 </a:solidFill>
@@ -8244,7 +8244,7 @@
               </a:spcAft>
             </a:pPr>
             <a:r>
-              <a:rPr sz="1300" b="0" i="0">
+              <a:rPr sz="1500" b="0" i="0">
                 <a:solidFill>
                   <a:srgbClr val="333333"/>
                 </a:solidFill>
@@ -8253,7 +8253,7 @@
               <a:t>–   Los problemas viejos </a:t>
             </a:r>
             <a:r>
-              <a:rPr sz="1300" b="1" i="0">
+              <a:rPr sz="1500" b="1" i="0">
                 <a:solidFill>
                   <a:srgbClr val="333333"/>
                 </a:solidFill>
@@ -8262,7 +8262,7 @@
               <a:t>siguen abiertos</a:t>
             </a:r>
             <a:r>
-              <a:rPr sz="1300" b="0" i="0">
+              <a:rPr sz="1500" b="0" i="0">
                 <a:solidFill>
                   <a:srgbClr val="333333"/>
                 </a:solidFill>
@@ -8482,7 +8482,7 @@
               </a:spcAft>
             </a:pPr>
             <a:r>
-              <a:rPr sz="1400" b="0" i="0">
+              <a:rPr sz="2000" b="0" i="0">
                 <a:solidFill>
                   <a:srgbClr val="333333"/>
                 </a:solidFill>
@@ -8491,7 +8491,7 @@
               <a:t>–   </a:t>
             </a:r>
             <a:r>
-              <a:rPr sz="1400" b="1" i="0">
+              <a:rPr sz="2000" b="1" i="0">
                 <a:solidFill>
                   <a:srgbClr val="333333"/>
                 </a:solidFill>
@@ -8500,7 +8500,7 @@
               <a:t>Años 40 y 50:</a:t>
             </a:r>
             <a:r>
-              <a:rPr sz="1400" b="0" i="0">
+              <a:rPr sz="2000" b="0" i="0">
                 <a:solidFill>
                   <a:srgbClr val="333333"/>
                 </a:solidFill>
@@ -8509,7 +8509,7 @@
               <a:t> el cuello de botella es el </a:t>
             </a:r>
             <a:r>
-              <a:rPr sz="1400" b="1" i="0">
+              <a:rPr sz="2000" b="1" i="0">
                 <a:solidFill>
                   <a:srgbClr val="333333"/>
                 </a:solidFill>
@@ -8518,7 +8518,7 @@
               <a:t>hardware</a:t>
             </a:r>
             <a:r>
-              <a:rPr sz="1400" b="0" i="0">
+              <a:rPr sz="2000" b="0" i="0">
                 <a:solidFill>
                   <a:srgbClr val="333333"/>
                 </a:solidFill>
@@ -8534,7 +8534,7 @@
               </a:spcAft>
             </a:pPr>
             <a:r>
-              <a:rPr sz="1400" b="0" i="0">
+              <a:rPr sz="2000" b="0" i="0">
                 <a:solidFill>
                   <a:srgbClr val="333333"/>
                 </a:solidFill>
@@ -8543,7 +8543,7 @@
               <a:t>–   </a:t>
             </a:r>
             <a:r>
-              <a:rPr sz="1400" b="1" i="0">
+              <a:rPr sz="2000" b="1" i="0">
                 <a:solidFill>
                   <a:srgbClr val="333333"/>
                 </a:solidFill>
@@ -8552,7 +8552,7 @@
               <a:t>Años 60:</a:t>
             </a:r>
             <a:r>
-              <a:rPr sz="1400" b="0" i="0">
+              <a:rPr sz="2000" b="0" i="0">
                 <a:solidFill>
                   <a:srgbClr val="333333"/>
                 </a:solidFill>
@@ -8561,7 +8561,7 @@
               <a:t> el hardware se abarata y crece, y aparecen sistemas que necesitan </a:t>
             </a:r>
             <a:r>
-              <a:rPr sz="1400" b="1" i="0">
+              <a:rPr sz="2000" b="1" i="0">
                 <a:solidFill>
                   <a:srgbClr val="333333"/>
                 </a:solidFill>
@@ -8570,7 +8570,7 @@
               <a:t>cientos de personas y años de trabajo</a:t>
             </a:r>
             <a:r>
-              <a:rPr sz="1400" b="0" i="0">
+              <a:rPr sz="2000" b="0" i="0">
                 <a:solidFill>
                   <a:srgbClr val="333333"/>
                 </a:solidFill>
@@ -8579,7 +8579,7 @@
               <a:t>. Ahí el cuello de botella se muda: ya no es la máquina, es </a:t>
             </a:r>
             <a:r>
-              <a:rPr sz="1400" b="1" i="0">
+              <a:rPr sz="2000" b="1" i="0">
                 <a:solidFill>
                   <a:srgbClr val="333333"/>
                 </a:solidFill>
@@ -8588,7 +8588,7 @@
               <a:t>coordinar el trabajo humano</a:t>
             </a:r>
             <a:r>
-              <a:rPr sz="1400" b="0" i="0">
+              <a:rPr sz="2000" b="0" i="0">
                 <a:solidFill>
                   <a:srgbClr val="333333"/>
                 </a:solidFill>
@@ -8604,7 +8604,7 @@
               </a:spcAft>
             </a:pPr>
             <a:r>
-              <a:rPr sz="1400" b="0" i="0">
+              <a:rPr sz="2000" b="0" i="0">
                 <a:solidFill>
                   <a:srgbClr val="333333"/>
                 </a:solidFill>
@@ -8613,7 +8613,7 @@
               <a:t>–   El sistema de reservas SABRE, el software del programa Apollo y el sistema operativo OS/360 de IBM son los tres casos que hicieron visible el problema: </a:t>
             </a:r>
             <a:r>
-              <a:rPr sz="1400" b="1" i="0">
+              <a:rPr sz="2000" b="1" i="0">
                 <a:solidFill>
                   <a:srgbClr val="333333"/>
                 </a:solidFill>
@@ -8622,7 +8622,7 @@
               <a:t>se pasaron de plazo y de presupuesto de forma escandalosa</a:t>
             </a:r>
             <a:r>
-              <a:rPr sz="1400" b="0" i="0">
+              <a:rPr sz="2000" b="0" i="0">
                 <a:solidFill>
                   <a:srgbClr val="333333"/>
                 </a:solidFill>
@@ -8638,7 +8638,7 @@
               </a:spcAft>
             </a:pPr>
             <a:r>
-              <a:rPr sz="1400" b="0" i="0">
+              <a:rPr sz="2000" b="0" i="0">
                 <a:solidFill>
                   <a:srgbClr val="333333"/>
                 </a:solidFill>
@@ -8647,7 +8647,7 @@
               <a:t>–   </a:t>
             </a:r>
             <a:r>
-              <a:rPr sz="1400" b="1" i="0">
+              <a:rPr sz="2000" b="1" i="0">
                 <a:solidFill>
                   <a:srgbClr val="333333"/>
                 </a:solidFill>
@@ -8656,7 +8656,7 @@
               <a:t>1968:</a:t>
             </a:r>
             <a:r>
-              <a:rPr sz="1400" b="0" i="0">
+              <a:rPr sz="2000" b="0" i="0">
                 <a:solidFill>
                   <a:srgbClr val="333333"/>
                 </a:solidFill>
@@ -8665,7 +8665,7 @@
               <a:t> la OTAN convoca una conferencia en Garmisch (Alemania) para hablar de eso y se acuña el término </a:t>
             </a:r>
             <a:r>
-              <a:rPr sz="1400" b="1" i="0">
+              <a:rPr sz="2000" b="1" i="0">
                 <a:solidFill>
                   <a:srgbClr val="333333"/>
                 </a:solidFill>
@@ -8674,7 +8674,7 @@
               <a:t>«ingeniería de software»</a:t>
             </a:r>
             <a:r>
-              <a:rPr sz="1400" b="0" i="0">
+              <a:rPr sz="2000" b="0" i="0">
                 <a:solidFill>
                   <a:srgbClr val="333333"/>
                 </a:solidFill>
@@ -8683,7 +8683,7 @@
               <a:t>. El nombre es una propuesta: si construir software se parece a construir un puente, entonces necesita </a:t>
             </a:r>
             <a:r>
-              <a:rPr sz="1400" b="1" i="0">
+              <a:rPr sz="2000" b="1" i="0">
                 <a:solidFill>
                   <a:srgbClr val="333333"/>
                 </a:solidFill>
@@ -8692,7 +8692,7 @@
               <a:t>método, no talento individual</a:t>
             </a:r>
             <a:r>
-              <a:rPr sz="1400" b="0" i="0">
+              <a:rPr sz="2000" b="0" i="0">
                 <a:solidFill>
                   <a:srgbClr val="333333"/>
                 </a:solidFill>
@@ -8708,7 +8708,7 @@
               </a:spcAft>
             </a:pPr>
             <a:r>
-              <a:rPr sz="1400" b="0" i="0">
+              <a:rPr sz="2000" b="0" i="0">
                 <a:solidFill>
                   <a:srgbClr val="333333"/>
                 </a:solidFill>
@@ -8717,7 +8717,7 @@
               <a:t>–   </a:t>
             </a:r>
             <a:r>
-              <a:rPr sz="1400" b="1" i="0">
+              <a:rPr sz="2000" b="1" i="0">
                 <a:solidFill>
                   <a:srgbClr val="333333"/>
                 </a:solidFill>
@@ -8726,7 +8726,7 @@
               <a:t>Ahí nace la disciplina:</a:t>
             </a:r>
             <a:r>
-              <a:rPr sz="1400" b="0" i="0">
+              <a:rPr sz="2000" b="0" i="0">
                 <a:solidFill>
                   <a:srgbClr val="333333"/>
                 </a:solidFill>

--- a/Introduccion a la Ingenieria/Clases/Clase 2 - Historia y evolucion de la Ingenieria/Presentacion.pptx
+++ b/Introduccion a la Ingenieria/Clases/Clase 2 - Historia y evolucion de la Ingenieria/Presentacion.pptx
@@ -5620,7 +5620,7 @@
                 </a:solidFill>
                 <a:latin typeface="Calibri"/>
               </a:rPr>
-              <a:t>Para la sesión 3</a:t>
+              <a:t>Para la Clase 3</a:t>
             </a:r>
           </a:p>
         </p:txBody>
@@ -5736,7 +5736,7 @@
                 </a:solidFill>
                 <a:latin typeface="Calibri"/>
               </a:rPr>
-              <a:t>Sesión 3 · Fundamentos básicos de la Ingeniería de Sistemas</a:t>
+              <a:t>Clase 3 · Fundamentos básicos de la Ingeniería de Sistemas</a:t>
             </a:r>
             <a:r>
               <a:rPr sz="2000" b="0" i="0">
